--- a/organiser-education-inflation.pptx
+++ b/organiser-education-inflation.pptx
@@ -5,7 +5,7 @@
     <p:sldMasterId id="2147483648" r:id="rId1"/>
   </p:sldMasterIdLst>
   <p:notesMasterIdLst>
-    <p:notesMasterId r:id="rId34"/>
+    <p:notesMasterId r:id="rId21"/>
   </p:notesMasterIdLst>
   <p:sldIdLst>
     <p:sldId id="256" r:id="rId2"/>
@@ -27,19 +27,6 @@
     <p:sldId id="272" r:id="rId18"/>
     <p:sldId id="273" r:id="rId19"/>
     <p:sldId id="274" r:id="rId20"/>
-    <p:sldId id="275" r:id="rId21"/>
-    <p:sldId id="276" r:id="rId22"/>
-    <p:sldId id="277" r:id="rId23"/>
-    <p:sldId id="278" r:id="rId24"/>
-    <p:sldId id="279" r:id="rId25"/>
-    <p:sldId id="280" r:id="rId26"/>
-    <p:sldId id="281" r:id="rId27"/>
-    <p:sldId id="282" r:id="rId28"/>
-    <p:sldId id="283" r:id="rId29"/>
-    <p:sldId id="284" r:id="rId30"/>
-    <p:sldId id="285" r:id="rId31"/>
-    <p:sldId id="286" r:id="rId32"/>
-    <p:sldId id="287" r:id="rId33"/>
   </p:sldIdLst>
   <p:sldSz cx="9144000" cy="5143500" type="screen16x9"/>
   <p:notesSz cx="6858000" cy="9144000"/>
@@ -6335,7 +6322,7 @@
               <a:rPr>
                 <a:hlinkClick r:id="rId2"/>
               </a:rPr>
-              <a:t>https://www.youtube-nocookie.com/watch?v=g6-lciEvkpA</a:t>
+              <a:t>https://www.youtube.com/watch?v=g6-lciEvkpA</a:t>
             </a:r>
           </a:p>
         </p:txBody>
@@ -6978,526 +6965,6 @@
 </p:sld>
 </file>
 
-<file path=ppt/slides/slide20.xml><?xml version="1.0" encoding="utf-8"?>
-<p:sld xmlns:a="http://schemas.openxmlformats.org/drawingml/2006/main" xmlns:r="http://schemas.openxmlformats.org/officeDocument/2006/relationships" xmlns:p="http://schemas.openxmlformats.org/presentationml/2006/main">
-  <p:cSld>
-    <p:spTree>
-      <p:nvGrpSpPr>
-        <p:cNvPr id="1" name=""/>
-        <p:cNvGrpSpPr/>
-        <p:nvPr/>
-      </p:nvGrpSpPr>
-      <p:grpSpPr>
-        <a:xfrm>
-          <a:off x="0" y="0"/>
-          <a:ext cx="0" cy="0"/>
-          <a:chOff x="0" y="0"/>
-          <a:chExt cx="0" cy="0"/>
-        </a:xfrm>
-      </p:grpSpPr>
-      <p:sp>
-        <p:nvSpPr>
-          <p:cNvPr id="2" name="Title 1"/>
-          <p:cNvSpPr>
-            <a:spLocks noGrp="1"/>
-          </p:cNvSpPr>
-          <p:nvPr>
-            <p:ph type="title"/>
-          </p:nvPr>
-        </p:nvSpPr>
-        <p:spPr>
-          <a:xfrm>
-            <a:off x="457201" y="730350"/>
-            <a:ext cx="8229600" cy="857250"/>
-          </a:xfrm>
-        </p:spPr>
-        <p:txBody>
-          <a:bodyPr/>
-          <a:lstStyle/>
-          <a:p>
-            <a:pPr lvl="0" indent="0" marL="0">
-              <a:buNone/>
-            </a:pPr>
-            <a:r>
-              <a:rPr/>
-              <a:t>Inflation Impact - Essential Goods and Services</a:t>
-            </a:r>
-          </a:p>
-        </p:txBody>
-      </p:sp>
-    </p:spTree>
-  </p:cSld>
-</p:sld>
-</file>
-
-<file path=ppt/slides/slide21.xml><?xml version="1.0" encoding="utf-8"?>
-<p:sld xmlns:a="http://schemas.openxmlformats.org/drawingml/2006/main" xmlns:r="http://schemas.openxmlformats.org/officeDocument/2006/relationships" xmlns:p="http://schemas.openxmlformats.org/presentationml/2006/main">
-  <p:cSld>
-    <p:spTree>
-      <p:nvGrpSpPr>
-        <p:cNvPr id="1" name=""/>
-        <p:cNvGrpSpPr/>
-        <p:nvPr/>
-      </p:nvGrpSpPr>
-      <p:grpSpPr>
-        <a:xfrm>
-          <a:off x="0" y="0"/>
-          <a:ext cx="0" cy="0"/>
-          <a:chOff x="0" y="0"/>
-          <a:chExt cx="0" cy="0"/>
-        </a:xfrm>
-      </p:grpSpPr>
-      <p:sp>
-        <p:nvSpPr>
-          <p:cNvPr id="2" name="Title 1"/>
-          <p:cNvSpPr>
-            <a:spLocks noGrp="1"/>
-          </p:cNvSpPr>
-          <p:nvPr>
-            <p:ph type="title"/>
-          </p:nvPr>
-        </p:nvSpPr>
-        <p:spPr>
-          <a:xfrm>
-            <a:off x="457201" y="730350"/>
-            <a:ext cx="8229600" cy="857250"/>
-          </a:xfrm>
-        </p:spPr>
-        <p:txBody>
-          <a:bodyPr/>
-          <a:lstStyle/>
-          <a:p>
-            <a:pPr lvl="0" indent="0" marL="0">
-              <a:buNone/>
-            </a:pPr>
-            <a:r>
-              <a:rPr/>
-              <a:t>Bread</a:t>
-            </a:r>
-          </a:p>
-        </p:txBody>
-      </p:sp>
-    </p:spTree>
-  </p:cSld>
-</p:sld>
-</file>
-
-<file path=ppt/slides/slide22.xml><?xml version="1.0" encoding="utf-8"?>
-<p:sld xmlns:a="http://schemas.openxmlformats.org/drawingml/2006/main" xmlns:r="http://schemas.openxmlformats.org/officeDocument/2006/relationships" xmlns:p="http://schemas.openxmlformats.org/presentationml/2006/main">
-  <p:cSld>
-    <p:spTree>
-      <p:nvGrpSpPr>
-        <p:cNvPr id="1" name=""/>
-        <p:cNvGrpSpPr/>
-        <p:nvPr/>
-      </p:nvGrpSpPr>
-      <p:grpSpPr>
-        <a:xfrm>
-          <a:off x="0" y="0"/>
-          <a:ext cx="0" cy="0"/>
-          <a:chOff x="0" y="0"/>
-          <a:chExt cx="0" cy="0"/>
-        </a:xfrm>
-      </p:grpSpPr>
-      <p:sp>
-        <p:nvSpPr>
-          <p:cNvPr id="2" name="Title 1"/>
-          <p:cNvSpPr>
-            <a:spLocks noGrp="1"/>
-          </p:cNvSpPr>
-          <p:nvPr>
-            <p:ph type="title"/>
-          </p:nvPr>
-        </p:nvSpPr>
-        <p:spPr>
-          <a:xfrm>
-            <a:off x="457201" y="730350"/>
-            <a:ext cx="8229600" cy="857250"/>
-          </a:xfrm>
-        </p:spPr>
-        <p:txBody>
-          <a:bodyPr/>
-          <a:lstStyle/>
-          <a:p>
-            <a:pPr lvl="0" indent="0" marL="0">
-              <a:buNone/>
-            </a:pPr>
-            <a:r>
-              <a:rPr/>
-              <a:t>Milk</a:t>
-            </a:r>
-          </a:p>
-        </p:txBody>
-      </p:sp>
-    </p:spTree>
-  </p:cSld>
-</p:sld>
-</file>
-
-<file path=ppt/slides/slide23.xml><?xml version="1.0" encoding="utf-8"?>
-<p:sld xmlns:a="http://schemas.openxmlformats.org/drawingml/2006/main" xmlns:r="http://schemas.openxmlformats.org/officeDocument/2006/relationships" xmlns:p="http://schemas.openxmlformats.org/presentationml/2006/main">
-  <p:cSld>
-    <p:spTree>
-      <p:nvGrpSpPr>
-        <p:cNvPr id="1" name=""/>
-        <p:cNvGrpSpPr/>
-        <p:nvPr/>
-      </p:nvGrpSpPr>
-      <p:grpSpPr>
-        <a:xfrm>
-          <a:off x="0" y="0"/>
-          <a:ext cx="0" cy="0"/>
-          <a:chOff x="0" y="0"/>
-          <a:chExt cx="0" cy="0"/>
-        </a:xfrm>
-      </p:grpSpPr>
-      <p:sp>
-        <p:nvSpPr>
-          <p:cNvPr id="2" name="Title 1"/>
-          <p:cNvSpPr>
-            <a:spLocks noGrp="1"/>
-          </p:cNvSpPr>
-          <p:nvPr>
-            <p:ph type="title"/>
-          </p:nvPr>
-        </p:nvSpPr>
-        <p:spPr>
-          <a:xfrm>
-            <a:off x="457201" y="730350"/>
-            <a:ext cx="8229600" cy="857250"/>
-          </a:xfrm>
-        </p:spPr>
-        <p:txBody>
-          <a:bodyPr/>
-          <a:lstStyle/>
-          <a:p>
-            <a:pPr lvl="0" indent="0" marL="0">
-              <a:buNone/>
-            </a:pPr>
-            <a:r>
-              <a:rPr/>
-              <a:t>Gas</a:t>
-            </a:r>
-          </a:p>
-        </p:txBody>
-      </p:sp>
-    </p:spTree>
-  </p:cSld>
-</p:sld>
-</file>
-
-<file path=ppt/slides/slide24.xml><?xml version="1.0" encoding="utf-8"?>
-<p:sld xmlns:a="http://schemas.openxmlformats.org/drawingml/2006/main" xmlns:r="http://schemas.openxmlformats.org/officeDocument/2006/relationships" xmlns:p="http://schemas.openxmlformats.org/presentationml/2006/main">
-  <p:cSld>
-    <p:spTree>
-      <p:nvGrpSpPr>
-        <p:cNvPr id="1" name=""/>
-        <p:cNvGrpSpPr/>
-        <p:nvPr/>
-      </p:nvGrpSpPr>
-      <p:grpSpPr>
-        <a:xfrm>
-          <a:off x="0" y="0"/>
-          <a:ext cx="0" cy="0"/>
-          <a:chOff x="0" y="0"/>
-          <a:chExt cx="0" cy="0"/>
-        </a:xfrm>
-      </p:grpSpPr>
-      <p:sp>
-        <p:nvSpPr>
-          <p:cNvPr id="2" name="Title 1"/>
-          <p:cNvSpPr>
-            <a:spLocks noGrp="1"/>
-          </p:cNvSpPr>
-          <p:nvPr>
-            <p:ph type="title"/>
-          </p:nvPr>
-        </p:nvSpPr>
-        <p:spPr>
-          <a:xfrm>
-            <a:off x="457201" y="730350"/>
-            <a:ext cx="8229600" cy="857250"/>
-          </a:xfrm>
-        </p:spPr>
-        <p:txBody>
-          <a:bodyPr/>
-          <a:lstStyle/>
-          <a:p>
-            <a:pPr lvl="0" indent="0" marL="0">
-              <a:buNone/>
-            </a:pPr>
-            <a:r>
-              <a:rPr/>
-              <a:t>Electricity</a:t>
-            </a:r>
-          </a:p>
-        </p:txBody>
-      </p:sp>
-    </p:spTree>
-  </p:cSld>
-</p:sld>
-</file>
-
-<file path=ppt/slides/slide25.xml><?xml version="1.0" encoding="utf-8"?>
-<p:sld xmlns:a="http://schemas.openxmlformats.org/drawingml/2006/main" xmlns:r="http://schemas.openxmlformats.org/officeDocument/2006/relationships" xmlns:p="http://schemas.openxmlformats.org/presentationml/2006/main">
-  <p:cSld>
-    <p:spTree>
-      <p:nvGrpSpPr>
-        <p:cNvPr id="1" name=""/>
-        <p:cNvGrpSpPr/>
-        <p:nvPr/>
-      </p:nvGrpSpPr>
-      <p:grpSpPr>
-        <a:xfrm>
-          <a:off x="0" y="0"/>
-          <a:ext cx="0" cy="0"/>
-          <a:chOff x="0" y="0"/>
-          <a:chExt cx="0" cy="0"/>
-        </a:xfrm>
-      </p:grpSpPr>
-      <p:sp>
-        <p:nvSpPr>
-          <p:cNvPr id="2" name="Title 1"/>
-          <p:cNvSpPr>
-            <a:spLocks noGrp="1"/>
-          </p:cNvSpPr>
-          <p:nvPr>
-            <p:ph type="title"/>
-          </p:nvPr>
-        </p:nvSpPr>
-        <p:spPr>
-          <a:xfrm>
-            <a:off x="457201" y="730350"/>
-            <a:ext cx="8229600" cy="857250"/>
-          </a:xfrm>
-        </p:spPr>
-        <p:txBody>
-          <a:bodyPr/>
-          <a:lstStyle/>
-          <a:p>
-            <a:pPr lvl="0" indent="0" marL="0">
-              <a:buNone/>
-            </a:pPr>
-            <a:r>
-              <a:rPr/>
-              <a:t>Property Rates</a:t>
-            </a:r>
-          </a:p>
-        </p:txBody>
-      </p:sp>
-    </p:spTree>
-  </p:cSld>
-</p:sld>
-</file>
-
-<file path=ppt/slides/slide26.xml><?xml version="1.0" encoding="utf-8"?>
-<p:sld xmlns:a="http://schemas.openxmlformats.org/drawingml/2006/main" xmlns:r="http://schemas.openxmlformats.org/officeDocument/2006/relationships" xmlns:p="http://schemas.openxmlformats.org/presentationml/2006/main">
-  <p:cSld>
-    <p:spTree>
-      <p:nvGrpSpPr>
-        <p:cNvPr id="1" name=""/>
-        <p:cNvGrpSpPr/>
-        <p:nvPr/>
-      </p:nvGrpSpPr>
-      <p:grpSpPr>
-        <a:xfrm>
-          <a:off x="0" y="0"/>
-          <a:ext cx="0" cy="0"/>
-          <a:chOff x="0" y="0"/>
-          <a:chExt cx="0" cy="0"/>
-        </a:xfrm>
-      </p:grpSpPr>
-      <p:sp>
-        <p:nvSpPr>
-          <p:cNvPr id="2" name="Title 1"/>
-          <p:cNvSpPr>
-            <a:spLocks noGrp="1"/>
-          </p:cNvSpPr>
-          <p:nvPr>
-            <p:ph type="title"/>
-          </p:nvPr>
-        </p:nvSpPr>
-        <p:spPr>
-          <a:xfrm>
-            <a:off x="457201" y="730350"/>
-            <a:ext cx="8229600" cy="857250"/>
-          </a:xfrm>
-        </p:spPr>
-        <p:txBody>
-          <a:bodyPr/>
-          <a:lstStyle/>
-          <a:p>
-            <a:pPr lvl="0" indent="0" marL="0">
-              <a:buNone/>
-            </a:pPr>
-            <a:r>
-              <a:rPr/>
-              <a:t>Rents</a:t>
-            </a:r>
-          </a:p>
-        </p:txBody>
-      </p:sp>
-    </p:spTree>
-  </p:cSld>
-</p:sld>
-</file>
-
-<file path=ppt/slides/slide27.xml><?xml version="1.0" encoding="utf-8"?>
-<p:sld xmlns:a="http://schemas.openxmlformats.org/drawingml/2006/main" xmlns:r="http://schemas.openxmlformats.org/officeDocument/2006/relationships" xmlns:p="http://schemas.openxmlformats.org/presentationml/2006/main">
-  <p:cSld>
-    <p:spTree>
-      <p:nvGrpSpPr>
-        <p:cNvPr id="1" name=""/>
-        <p:cNvGrpSpPr/>
-        <p:nvPr/>
-      </p:nvGrpSpPr>
-      <p:grpSpPr>
-        <a:xfrm>
-          <a:off x="0" y="0"/>
-          <a:ext cx="0" cy="0"/>
-          <a:chOff x="0" y="0"/>
-          <a:chExt cx="0" cy="0"/>
-        </a:xfrm>
-      </p:grpSpPr>
-      <p:sp>
-        <p:nvSpPr>
-          <p:cNvPr id="2" name="Title 1"/>
-          <p:cNvSpPr>
-            <a:spLocks noGrp="1"/>
-          </p:cNvSpPr>
-          <p:nvPr>
-            <p:ph type="title"/>
-          </p:nvPr>
-        </p:nvSpPr>
-        <p:spPr>
-          <a:xfrm>
-            <a:off x="457201" y="730350"/>
-            <a:ext cx="8229600" cy="857250"/>
-          </a:xfrm>
-        </p:spPr>
-        <p:txBody>
-          <a:bodyPr/>
-          <a:lstStyle/>
-          <a:p>
-            <a:pPr lvl="0" indent="0" marL="0">
-              <a:buNone/>
-            </a:pPr>
-            <a:r>
-              <a:rPr/>
-              <a:t>Water</a:t>
-            </a:r>
-          </a:p>
-        </p:txBody>
-      </p:sp>
-    </p:spTree>
-  </p:cSld>
-</p:sld>
-</file>
-
-<file path=ppt/slides/slide28.xml><?xml version="1.0" encoding="utf-8"?>
-<p:sld xmlns:a="http://schemas.openxmlformats.org/drawingml/2006/main" xmlns:r="http://schemas.openxmlformats.org/officeDocument/2006/relationships" xmlns:p="http://schemas.openxmlformats.org/presentationml/2006/main">
-  <p:cSld>
-    <p:spTree>
-      <p:nvGrpSpPr>
-        <p:cNvPr id="1" name=""/>
-        <p:cNvGrpSpPr/>
-        <p:nvPr/>
-      </p:nvGrpSpPr>
-      <p:grpSpPr>
-        <a:xfrm>
-          <a:off x="0" y="0"/>
-          <a:ext cx="0" cy="0"/>
-          <a:chOff x="0" y="0"/>
-          <a:chExt cx="0" cy="0"/>
-        </a:xfrm>
-      </p:grpSpPr>
-      <p:sp>
-        <p:nvSpPr>
-          <p:cNvPr id="2" name="Title 1"/>
-          <p:cNvSpPr>
-            <a:spLocks noGrp="1"/>
-          </p:cNvSpPr>
-          <p:nvPr>
-            <p:ph type="title"/>
-          </p:nvPr>
-        </p:nvSpPr>
-        <p:spPr>
-          <a:xfrm>
-            <a:off x="457201" y="730350"/>
-            <a:ext cx="8229600" cy="857250"/>
-          </a:xfrm>
-        </p:spPr>
-        <p:txBody>
-          <a:bodyPr/>
-          <a:lstStyle/>
-          <a:p>
-            <a:pPr lvl="0" indent="0" marL="0">
-              <a:buNone/>
-            </a:pPr>
-            <a:r>
-              <a:rPr/>
-              <a:t>Food and Non-alcoholic Beverages</a:t>
-            </a:r>
-          </a:p>
-        </p:txBody>
-      </p:sp>
-    </p:spTree>
-  </p:cSld>
-</p:sld>
-</file>
-
-<file path=ppt/slides/slide29.xml><?xml version="1.0" encoding="utf-8"?>
-<p:sld xmlns:a="http://schemas.openxmlformats.org/drawingml/2006/main" xmlns:r="http://schemas.openxmlformats.org/officeDocument/2006/relationships" xmlns:p="http://schemas.openxmlformats.org/presentationml/2006/main">
-  <p:cSld>
-    <p:spTree>
-      <p:nvGrpSpPr>
-        <p:cNvPr id="1" name=""/>
-        <p:cNvGrpSpPr/>
-        <p:nvPr/>
-      </p:nvGrpSpPr>
-      <p:grpSpPr>
-        <a:xfrm>
-          <a:off x="0" y="0"/>
-          <a:ext cx="0" cy="0"/>
-          <a:chOff x="0" y="0"/>
-          <a:chExt cx="0" cy="0"/>
-        </a:xfrm>
-      </p:grpSpPr>
-      <p:sp>
-        <p:nvSpPr>
-          <p:cNvPr id="2" name="Title 1"/>
-          <p:cNvSpPr>
-            <a:spLocks noGrp="1"/>
-          </p:cNvSpPr>
-          <p:nvPr>
-            <p:ph type="title"/>
-          </p:nvPr>
-        </p:nvSpPr>
-        <p:spPr>
-          <a:xfrm>
-            <a:off x="457201" y="730350"/>
-            <a:ext cx="8229600" cy="857250"/>
-          </a:xfrm>
-        </p:spPr>
-        <p:txBody>
-          <a:bodyPr/>
-          <a:lstStyle/>
-          <a:p>
-            <a:pPr lvl="0" indent="0" marL="0">
-              <a:buNone/>
-            </a:pPr>
-            <a:r>
-              <a:rPr/>
-              <a:t>Housing - Including Mortgages</a:t>
-            </a:r>
-          </a:p>
-        </p:txBody>
-      </p:sp>
-    </p:spTree>
-  </p:cSld>
-</p:sld>
-</file>
-
 <file path=ppt/slides/slide3.xml><?xml version="1.0" encoding="utf-8"?>
 <p:sld xmlns:a="http://schemas.openxmlformats.org/drawingml/2006/main" xmlns:r="http://schemas.openxmlformats.org/officeDocument/2006/relationships" xmlns:p="http://schemas.openxmlformats.org/presentationml/2006/main">
   <p:cSld>
@@ -7578,162 +7045,6 @@
             <a:r>
               <a:rPr/>
               <a:t>Talking about productivity in the workplace</a:t>
-            </a:r>
-          </a:p>
-        </p:txBody>
-      </p:sp>
-    </p:spTree>
-  </p:cSld>
-</p:sld>
-</file>
-
-<file path=ppt/slides/slide30.xml><?xml version="1.0" encoding="utf-8"?>
-<p:sld xmlns:a="http://schemas.openxmlformats.org/drawingml/2006/main" xmlns:r="http://schemas.openxmlformats.org/officeDocument/2006/relationships" xmlns:p="http://schemas.openxmlformats.org/presentationml/2006/main">
-  <p:cSld>
-    <p:spTree>
-      <p:nvGrpSpPr>
-        <p:cNvPr id="1" name=""/>
-        <p:cNvGrpSpPr/>
-        <p:nvPr/>
-      </p:nvGrpSpPr>
-      <p:grpSpPr>
-        <a:xfrm>
-          <a:off x="0" y="0"/>
-          <a:ext cx="0" cy="0"/>
-          <a:chOff x="0" y="0"/>
-          <a:chExt cx="0" cy="0"/>
-        </a:xfrm>
-      </p:grpSpPr>
-      <p:sp>
-        <p:nvSpPr>
-          <p:cNvPr id="2" name="Title 1"/>
-          <p:cNvSpPr>
-            <a:spLocks noGrp="1"/>
-          </p:cNvSpPr>
-          <p:nvPr>
-            <p:ph type="title"/>
-          </p:nvPr>
-        </p:nvSpPr>
-        <p:spPr>
-          <a:xfrm>
-            <a:off x="457201" y="730350"/>
-            <a:ext cx="8229600" cy="857250"/>
-          </a:xfrm>
-        </p:spPr>
-        <p:txBody>
-          <a:bodyPr/>
-          <a:lstStyle/>
-          <a:p>
-            <a:pPr lvl="0" indent="0" marL="0">
-              <a:buNone/>
-            </a:pPr>
-            <a:r>
-              <a:rPr/>
-              <a:t>Change in Price relative to Wages</a:t>
-            </a:r>
-          </a:p>
-        </p:txBody>
-      </p:sp>
-    </p:spTree>
-  </p:cSld>
-</p:sld>
-</file>
-
-<file path=ppt/slides/slide31.xml><?xml version="1.0" encoding="utf-8"?>
-<p:sld xmlns:a="http://schemas.openxmlformats.org/drawingml/2006/main" xmlns:r="http://schemas.openxmlformats.org/officeDocument/2006/relationships" xmlns:p="http://schemas.openxmlformats.org/presentationml/2006/main">
-  <p:cSld>
-    <p:spTree>
-      <p:nvGrpSpPr>
-        <p:cNvPr id="1" name=""/>
-        <p:cNvGrpSpPr/>
-        <p:nvPr/>
-      </p:nvGrpSpPr>
-      <p:grpSpPr>
-        <a:xfrm>
-          <a:off x="0" y="0"/>
-          <a:ext cx="0" cy="0"/>
-          <a:chOff x="0" y="0"/>
-          <a:chExt cx="0" cy="0"/>
-        </a:xfrm>
-      </p:grpSpPr>
-      <p:sp>
-        <p:nvSpPr>
-          <p:cNvPr id="2" name="Title 1"/>
-          <p:cNvSpPr>
-            <a:spLocks noGrp="1"/>
-          </p:cNvSpPr>
-          <p:nvPr>
-            <p:ph type="title"/>
-          </p:nvPr>
-        </p:nvSpPr>
-        <p:spPr>
-          <a:xfrm>
-            <a:off x="457201" y="730350"/>
-            <a:ext cx="8229600" cy="857250"/>
-          </a:xfrm>
-        </p:spPr>
-        <p:txBody>
-          <a:bodyPr/>
-          <a:lstStyle/>
-          <a:p>
-            <a:pPr lvl="0" indent="0" marL="0">
-              <a:buNone/>
-            </a:pPr>
-            <a:r>
-              <a:rPr/>
-              <a:t>So how much should we ask for?</a:t>
-            </a:r>
-          </a:p>
-        </p:txBody>
-      </p:sp>
-    </p:spTree>
-  </p:cSld>
-</p:sld>
-</file>
-
-<file path=ppt/slides/slide32.xml><?xml version="1.0" encoding="utf-8"?>
-<p:sld xmlns:a="http://schemas.openxmlformats.org/drawingml/2006/main" xmlns:r="http://schemas.openxmlformats.org/officeDocument/2006/relationships" xmlns:p="http://schemas.openxmlformats.org/presentationml/2006/main">
-  <p:cSld>
-    <p:spTree>
-      <p:nvGrpSpPr>
-        <p:cNvPr id="1" name=""/>
-        <p:cNvGrpSpPr/>
-        <p:nvPr/>
-      </p:nvGrpSpPr>
-      <p:grpSpPr>
-        <a:xfrm>
-          <a:off x="0" y="0"/>
-          <a:ext cx="0" cy="0"/>
-          <a:chOff x="0" y="0"/>
-          <a:chExt cx="0" cy="0"/>
-        </a:xfrm>
-      </p:grpSpPr>
-      <p:sp>
-        <p:nvSpPr>
-          <p:cNvPr id="2" name="Title 1"/>
-          <p:cNvSpPr>
-            <a:spLocks noGrp="1"/>
-          </p:cNvSpPr>
-          <p:nvPr>
-            <p:ph type="title"/>
-          </p:nvPr>
-        </p:nvSpPr>
-        <p:spPr>
-          <a:xfrm>
-            <a:off x="457201" y="730350"/>
-            <a:ext cx="8229600" cy="857250"/>
-          </a:xfrm>
-        </p:spPr>
-        <p:txBody>
-          <a:bodyPr/>
-          <a:lstStyle/>
-          <a:p>
-            <a:pPr lvl="0" indent="0" marL="0">
-              <a:buNone/>
-            </a:pPr>
-            <a:r>
-              <a:rPr/>
-              <a:t>Wages in Manufacturing</a:t>
             </a:r>
           </a:p>
         </p:txBody>
